--- a/assets/pptx/catalog-60.pptx
+++ b/assets/pptx/catalog-60.pptx
@@ -3248,7 +3248,7 @@
                 <a:ea typeface="Ebrima"/>
                 <a:cs typeface="Ebrima"/>
               </a:rPr>
-              <a:t>ስሰማዉ (3x) ስሰማው (3x)</a:t>
+              <a:t>ስሰማዉ 3x ስሰማው 3x</a:t>
             </a:r>
           </a:p>
           <a:p>
@@ -3284,7 +3284,7 @@
                 <a:ea typeface="Ebrima"/>
                 <a:cs typeface="Ebrima"/>
               </a:rPr>
-              <a:t>እየሱሴ የአንተ ስም ነዉ እወደዋለሁኝ (2x)</a:t>
+              <a:t>እየሱሴ የአንተ ስም ነዉ እወደዋለሁኝ 2x</a:t>
             </a:r>
           </a:p>
         </p:txBody>
@@ -3387,7 +3387,7 @@
                 <a:ea typeface="Ebrima"/>
                 <a:cs typeface="Ebrima"/>
               </a:rPr>
-              <a:t>መስማት አይሰለቸኝ (2x)</a:t>
+              <a:t>መስማት አይሰለቸኝ 2x</a:t>
             </a:r>
           </a:p>
           <a:p>
@@ -3405,7 +3405,7 @@
                 <a:ea typeface="Ebrima"/>
                 <a:cs typeface="Ebrima"/>
               </a:rPr>
-              <a:t>ተሰበኬ (2x) ሰምቼ (2x)</a:t>
+              <a:t>ተሰበኬ 2x ሰምቼ 2x</a:t>
             </a:r>
           </a:p>
           <a:p>
@@ -3423,7 +3423,7 @@
                 <a:ea typeface="Ebrima"/>
                 <a:cs typeface="Ebrima"/>
               </a:rPr>
-              <a:t>ጆሮዬ ያልጠገበዉ ያንተን ስም ነዉ (2x)</a:t>
+              <a:t>ጆሮዬ ያልጠገበዉ ያንተን ስም ነዉ 2x</a:t>
             </a:r>
           </a:p>
         </p:txBody>
@@ -3490,7 +3490,7 @@
                 <a:ea typeface="Ebrima"/>
                 <a:cs typeface="Ebrima"/>
               </a:rPr>
-              <a:t>ኢየሱስ ኢየሱስ ኢየሱስ ኢየሱስ (2x)</a:t>
+              <a:t>ኢየሱስ ኢየሱስ ኢየሱስ ኢየሱስ 2x</a:t>
             </a:r>
           </a:p>
           <a:p>
@@ -3701,7 +3701,7 @@
                 <a:ea typeface="Ebrima"/>
                 <a:cs typeface="Ebrima"/>
               </a:rPr>
-              <a:t>እጠራዋለሁ ኢየሱስ (8x)</a:t>
+              <a:t>እጠራዋለሁ ኢየሱስ 8x</a:t>
             </a:r>
           </a:p>
         </p:txBody>
@@ -3768,7 +3768,7 @@
                 <a:ea typeface="Ebrima"/>
                 <a:cs typeface="Ebrima"/>
               </a:rPr>
-              <a:t>ስሙ የጸና ግንብ ነዉ (3x)</a:t>
+              <a:t>ስሙ የጸና ግንብ ነዉ 3x</a:t>
             </a:r>
           </a:p>
           <a:p>
@@ -3786,7 +3786,7 @@
                 <a:ea typeface="Ebrima"/>
                 <a:cs typeface="Ebrima"/>
               </a:rPr>
-              <a:t>ስሙ የጸና ግንብ ነዉ (3x)</a:t>
+              <a:t>ስሙ የጸና ግንብ ነዉ 3x</a:t>
             </a:r>
           </a:p>
         </p:txBody>
@@ -3871,7 +3871,7 @@
                 <a:ea typeface="Ebrima"/>
                 <a:cs typeface="Ebrima"/>
               </a:rPr>
-              <a:t>የጌታን ስም የሚጠራ እርሱ ይድናለል (2x)</a:t>
+              <a:t>የጌታን ስም የሚጠራ እርሱ ይድናለል 2x</a:t>
             </a:r>
           </a:p>
         </p:txBody>
@@ -3938,7 +3938,7 @@
                 <a:ea typeface="Ebrima"/>
                 <a:cs typeface="Ebrima"/>
               </a:rPr>
-              <a:t>ስሰማዉ (3x) ስሰማው (3x)</a:t>
+              <a:t>ስሰማዉ 3x ስሰማው 3x</a:t>
             </a:r>
           </a:p>
           <a:p>
@@ -3974,7 +3974,7 @@
                 <a:ea typeface="Ebrima"/>
                 <a:cs typeface="Ebrima"/>
               </a:rPr>
-              <a:t>እየሱሴ የአንተ ስም ነዉ እወደዋለሁኝ (2x)</a:t>
+              <a:t>እየሱሴ የአንተ ስም ነዉ እወደዋለሁኝ 2x</a:t>
             </a:r>
           </a:p>
         </p:txBody>
@@ -4077,7 +4077,7 @@
                 <a:ea typeface="Ebrima"/>
                 <a:cs typeface="Ebrima"/>
               </a:rPr>
-              <a:t>መስማት አይሰለቸኝ (2x)</a:t>
+              <a:t>መስማት አይሰለቸኝ 2x</a:t>
             </a:r>
           </a:p>
         </p:txBody>
